--- a/2025/01-2 Модели ВР и постановка задачи.pptx
+++ b/2025/01-2 Модели ВР и постановка задачи.pptx
@@ -226,7 +226,7 @@
           <a:p>
             <a:fld id="{CDA96C9A-3213-B245-BC64-7E419D14BD9D}" type="datetimeFigureOut">
               <a:rPr lang="ru-RU" smtClean="0"/>
-              <a:t>15.07.2025</a:t>
+              <a:t>21.07.2025</a:t>
             </a:fld>
             <a:endParaRPr lang="ru-RU"/>
           </a:p>
@@ -960,7 +960,7 @@
           <a:p>
             <a:fld id="{BEE214BE-636D-8A45-BCA6-8B7ED77AA124}" type="datetime1">
               <a:rPr lang="ru-RU" smtClean="0"/>
-              <a:t>15.07.2025</a:t>
+              <a:t>21.07.2025</a:t>
             </a:fld>
             <a:endParaRPr lang="en-US"/>
           </a:p>
@@ -1130,7 +1130,7 @@
           <a:p>
             <a:fld id="{5855274A-4ED4-0146-A3E9-88EF200B5196}" type="datetime1">
               <a:rPr lang="ru-RU" smtClean="0"/>
-              <a:t>15.07.2025</a:t>
+              <a:t>21.07.2025</a:t>
             </a:fld>
             <a:endParaRPr lang="en-US"/>
           </a:p>
@@ -1310,7 +1310,7 @@
           <a:p>
             <a:fld id="{8A78DFF1-9FDC-144B-973E-B4B4609709DF}" type="datetime1">
               <a:rPr lang="ru-RU" smtClean="0"/>
-              <a:t>15.07.2025</a:t>
+              <a:t>21.07.2025</a:t>
             </a:fld>
             <a:endParaRPr lang="en-US"/>
           </a:p>
@@ -1480,7 +1480,7 @@
           <a:p>
             <a:fld id="{8233A339-F8AE-5C45-BEAE-07EF9DC78B60}" type="datetime1">
               <a:rPr lang="ru-RU" smtClean="0"/>
-              <a:t>15.07.2025</a:t>
+              <a:t>21.07.2025</a:t>
             </a:fld>
             <a:endParaRPr lang="en-US"/>
           </a:p>
@@ -1726,7 +1726,7 @@
           <a:p>
             <a:fld id="{7586FDE4-97E0-CE4A-988C-F30B221290A7}" type="datetime1">
               <a:rPr lang="ru-RU" smtClean="0"/>
-              <a:t>15.07.2025</a:t>
+              <a:t>21.07.2025</a:t>
             </a:fld>
             <a:endParaRPr lang="en-US"/>
           </a:p>
@@ -1958,7 +1958,7 @@
           <a:p>
             <a:fld id="{C36ECE8B-8DEC-154E-9F03-047C8DDA20DC}" type="datetime1">
               <a:rPr lang="ru-RU" smtClean="0"/>
-              <a:t>15.07.2025</a:t>
+              <a:t>21.07.2025</a:t>
             </a:fld>
             <a:endParaRPr lang="en-US"/>
           </a:p>
@@ -2325,7 +2325,7 @@
           <a:p>
             <a:fld id="{440816D5-BDB8-B34B-8ACA-ECBDD12E7321}" type="datetime1">
               <a:rPr lang="ru-RU" smtClean="0"/>
-              <a:t>15.07.2025</a:t>
+              <a:t>21.07.2025</a:t>
             </a:fld>
             <a:endParaRPr lang="en-US"/>
           </a:p>
@@ -2443,7 +2443,7 @@
           <a:p>
             <a:fld id="{8A8C589A-5627-764C-AF96-C1E2F9A00A4D}" type="datetime1">
               <a:rPr lang="ru-RU" smtClean="0"/>
-              <a:t>15.07.2025</a:t>
+              <a:t>21.07.2025</a:t>
             </a:fld>
             <a:endParaRPr lang="en-US"/>
           </a:p>
@@ -2538,7 +2538,7 @@
           <a:p>
             <a:fld id="{603EE0D0-1696-6D4F-B917-4AFB24A74E8B}" type="datetime1">
               <a:rPr lang="ru-RU" smtClean="0"/>
-              <a:t>15.07.2025</a:t>
+              <a:t>21.07.2025</a:t>
             </a:fld>
             <a:endParaRPr lang="en-US"/>
           </a:p>
@@ -2815,7 +2815,7 @@
           <a:p>
             <a:fld id="{13C8A91E-B09B-2240-9AA3-B1D4BCC6296E}" type="datetime1">
               <a:rPr lang="ru-RU" smtClean="0"/>
-              <a:t>15.07.2025</a:t>
+              <a:t>21.07.2025</a:t>
             </a:fld>
             <a:endParaRPr lang="en-US"/>
           </a:p>
@@ -3072,7 +3072,7 @@
           <a:p>
             <a:fld id="{3BE9760E-DA8D-6747-B31E-62858C8727B8}" type="datetime1">
               <a:rPr lang="ru-RU" smtClean="0"/>
-              <a:t>15.07.2025</a:t>
+              <a:t>21.07.2025</a:t>
             </a:fld>
             <a:endParaRPr lang="en-US"/>
           </a:p>
@@ -3285,7 +3285,7 @@
           <a:p>
             <a:fld id="{D31305DF-F750-CC43-967D-51A20925EE94}" type="datetime1">
               <a:rPr lang="ru-RU" smtClean="0"/>
-              <a:t>15.07.2025</a:t>
+              <a:t>21.07.2025</a:t>
             </a:fld>
             <a:endParaRPr lang="en-US"/>
           </a:p>
@@ -3726,21 +3726,6 @@
             <a:br>
               <a:rPr lang="ru-RU" sz="8000" dirty="0" smtClean="0"/>
             </a:br>
-            <a:r>
-              <a:rPr lang="ru-RU" sz="8000" dirty="0" smtClean="0"/>
-              <a:t>и </a:t>
-            </a:r>
-            <a:br>
-              <a:rPr lang="ru-RU" sz="8000" dirty="0" smtClean="0"/>
-            </a:br>
-            <a:r>
-              <a:rPr lang="ru-RU" sz="8000" dirty="0" smtClean="0"/>
-              <a:t>Постановка </a:t>
-            </a:r>
-            <a:r>
-              <a:rPr lang="ru-RU" sz="8000" dirty="0"/>
-              <a:t>задач предсказания ВР</a:t>
-            </a:r>
             <a:endParaRPr lang="en-US" sz="8000" dirty="0"/>
           </a:p>
         </p:txBody>
@@ -3784,6 +3769,13 @@
   <p:clrMapOvr>
     <a:masterClrMapping/>
   </p:clrMapOvr>
+  <p:timing>
+    <p:tnLst>
+      <p:par>
+        <p:cTn id="1" dur="indefinite" restart="never" nodeType="tmRoot"/>
+      </p:par>
+    </p:tnLst>
+  </p:timing>
 </p:sld>
 </file>
 
@@ -11238,6 +11230,13 @@
   <p:clrMapOvr>
     <a:masterClrMapping/>
   </p:clrMapOvr>
+  <p:timing>
+    <p:tnLst>
+      <p:par>
+        <p:cTn id="1" dur="indefinite" restart="never" nodeType="tmRoot"/>
+      </p:par>
+    </p:tnLst>
+  </p:timing>
 </p:sld>
 </file>
 
@@ -11660,11 +11659,11 @@
   <p:clrMapOvr>
     <a:masterClrMapping/>
   </p:clrMapOvr>
-  <mc:AlternateContent xmlns:mc="http://schemas.openxmlformats.org/markup-compatibility/2006">
-    <mc:Choice xmlns:p14="http://schemas.microsoft.com/office/powerpoint/2010/main" Requires="p14">
+  <mc:AlternateContent xmlns:mc="http://schemas.openxmlformats.org/markup-compatibility/2006" xmlns:p14="http://schemas.microsoft.com/office/powerpoint/2010/main">
+    <mc:Choice Requires="p14">
       <p:transition spd="slow" p14:dur="2000"/>
     </mc:Choice>
-    <mc:Fallback>
+    <mc:Fallback xmlns="">
       <p:transition spd="slow"/>
     </mc:Fallback>
   </mc:AlternateContent>
@@ -11820,11 +11819,11 @@
   <p:clrMapOvr>
     <a:masterClrMapping/>
   </p:clrMapOvr>
-  <mc:AlternateContent xmlns:mc="http://schemas.openxmlformats.org/markup-compatibility/2006">
-    <mc:Choice xmlns:p14="http://schemas.microsoft.com/office/powerpoint/2010/main" Requires="p14">
+  <mc:AlternateContent xmlns:mc="http://schemas.openxmlformats.org/markup-compatibility/2006" xmlns:p14="http://schemas.microsoft.com/office/powerpoint/2010/main">
+    <mc:Choice Requires="p14">
       <p:transition spd="slow" p14:dur="2000"/>
     </mc:Choice>
-    <mc:Fallback>
+    <mc:Fallback xmlns="">
       <p:transition spd="slow"/>
     </mc:Fallback>
   </mc:AlternateContent>
@@ -11992,11 +11991,11 @@
   <p:clrMapOvr>
     <a:masterClrMapping/>
   </p:clrMapOvr>
-  <mc:AlternateContent xmlns:mc="http://schemas.openxmlformats.org/markup-compatibility/2006">
-    <mc:Choice xmlns:p14="http://schemas.microsoft.com/office/powerpoint/2010/main" Requires="p14">
+  <mc:AlternateContent xmlns:mc="http://schemas.openxmlformats.org/markup-compatibility/2006" xmlns:p14="http://schemas.microsoft.com/office/powerpoint/2010/main">
+    <mc:Choice Requires="p14">
       <p:transition spd="slow" p14:dur="2000"/>
     </mc:Choice>
-    <mc:Fallback>
+    <mc:Fallback xmlns="">
       <p:transition spd="slow"/>
     </mc:Fallback>
   </mc:AlternateContent>
@@ -12044,7 +12043,6 @@
               <a:rPr lang="ru-RU" dirty="0"/>
               <a:t>Фреймворк анализа ВР</a:t>
             </a:r>
-            <a:endParaRPr lang="ru-RU" dirty="0"/>
           </a:p>
         </p:txBody>
       </p:sp>
@@ -12172,11 +12170,11 @@
   <p:clrMapOvr>
     <a:masterClrMapping/>
   </p:clrMapOvr>
-  <mc:AlternateContent xmlns:mc="http://schemas.openxmlformats.org/markup-compatibility/2006">
-    <mc:Choice xmlns:p14="http://schemas.microsoft.com/office/powerpoint/2010/main" Requires="p14">
+  <mc:AlternateContent xmlns:mc="http://schemas.openxmlformats.org/markup-compatibility/2006" xmlns:p14="http://schemas.microsoft.com/office/powerpoint/2010/main">
+    <mc:Choice Requires="p14">
       <p:transition spd="slow" p14:dur="2000"/>
     </mc:Choice>
-    <mc:Fallback>
+    <mc:Fallback xmlns="">
       <p:transition spd="slow"/>
     </mc:Fallback>
   </mc:AlternateContent>
@@ -12219,7 +12217,6 @@
               <a:rPr lang="ru-RU" dirty="0"/>
               <a:t>Фреймворк анализа ВР</a:t>
             </a:r>
-            <a:endParaRPr lang="ru-RU" dirty="0"/>
           </a:p>
         </p:txBody>
       </p:sp>
@@ -12372,11 +12369,11 @@
   <p:clrMapOvr>
     <a:masterClrMapping/>
   </p:clrMapOvr>
-  <mc:AlternateContent xmlns:mc="http://schemas.openxmlformats.org/markup-compatibility/2006">
-    <mc:Choice xmlns:p14="http://schemas.microsoft.com/office/powerpoint/2010/main" Requires="p14">
+  <mc:AlternateContent xmlns:mc="http://schemas.openxmlformats.org/markup-compatibility/2006" xmlns:p14="http://schemas.microsoft.com/office/powerpoint/2010/main">
+    <mc:Choice Requires="p14">
       <p:transition spd="slow" p14:dur="2000"/>
     </mc:Choice>
-    <mc:Fallback>
+    <mc:Fallback xmlns="">
       <p:transition spd="slow"/>
     </mc:Fallback>
   </mc:AlternateContent>
@@ -12643,11 +12640,11 @@
   <p:clrMapOvr>
     <a:masterClrMapping/>
   </p:clrMapOvr>
-  <mc:AlternateContent xmlns:mc="http://schemas.openxmlformats.org/markup-compatibility/2006">
-    <mc:Choice xmlns:p14="http://schemas.microsoft.com/office/powerpoint/2010/main" Requires="p14">
+  <mc:AlternateContent xmlns:mc="http://schemas.openxmlformats.org/markup-compatibility/2006" xmlns:p14="http://schemas.microsoft.com/office/powerpoint/2010/main">
+    <mc:Choice Requires="p14">
       <p:transition spd="slow" p14:dur="2000"/>
     </mc:Choice>
-    <mc:Fallback>
+    <mc:Fallback xmlns="">
       <p:transition spd="slow"/>
     </mc:Fallback>
   </mc:AlternateContent>
@@ -12888,11 +12885,11 @@
   <p:clrMapOvr>
     <a:masterClrMapping/>
   </p:clrMapOvr>
-  <mc:AlternateContent xmlns:mc="http://schemas.openxmlformats.org/markup-compatibility/2006">
-    <mc:Choice xmlns:p14="http://schemas.microsoft.com/office/powerpoint/2010/main" Requires="p14">
+  <mc:AlternateContent xmlns:mc="http://schemas.openxmlformats.org/markup-compatibility/2006" xmlns:p14="http://schemas.microsoft.com/office/powerpoint/2010/main">
+    <mc:Choice Requires="p14">
       <p:transition spd="slow" p14:dur="2000"/>
     </mc:Choice>
-    <mc:Fallback>
+    <mc:Fallback xmlns="">
       <p:transition spd="slow"/>
     </mc:Fallback>
   </mc:AlternateContent>
@@ -13129,11 +13126,11 @@
   <p:clrMapOvr>
     <a:masterClrMapping/>
   </p:clrMapOvr>
-  <mc:AlternateContent xmlns:mc="http://schemas.openxmlformats.org/markup-compatibility/2006">
-    <mc:Choice xmlns:p14="http://schemas.microsoft.com/office/powerpoint/2010/main" Requires="p14">
+  <mc:AlternateContent xmlns:mc="http://schemas.openxmlformats.org/markup-compatibility/2006" xmlns:p14="http://schemas.microsoft.com/office/powerpoint/2010/main">
+    <mc:Choice Requires="p14">
       <p:transition spd="slow" p14:dur="2000"/>
     </mc:Choice>
-    <mc:Fallback>
+    <mc:Fallback xmlns="">
       <p:transition spd="slow"/>
     </mc:Fallback>
   </mc:AlternateContent>
@@ -14336,11 +14333,11 @@
   <p:clrMapOvr>
     <a:masterClrMapping/>
   </p:clrMapOvr>
-  <mc:AlternateContent xmlns:mc="http://schemas.openxmlformats.org/markup-compatibility/2006">
-    <mc:Choice xmlns:p14="http://schemas.microsoft.com/office/powerpoint/2010/main" Requires="p14">
+  <mc:AlternateContent xmlns:mc="http://schemas.openxmlformats.org/markup-compatibility/2006" xmlns:p14="http://schemas.microsoft.com/office/powerpoint/2010/main">
+    <mc:Choice Requires="p14">
       <p:transition spd="slow" p14:dur="2000"/>
     </mc:Choice>
-    <mc:Fallback>
+    <mc:Fallback xmlns="">
       <p:transition spd="slow"/>
     </mc:Fallback>
   </mc:AlternateContent>
